--- a/Bank_Management_System_Presentation.pptx
+++ b/Bank_Management_System_Presentation.pptx
@@ -2277,138 +2277,29 @@
           </a:p>
         </p:txBody>
       </p:sp>
-      <p:sp>
-        <p:nvSpPr>
-          <p:cNvPr id="9" name="Shape 7"/>
-          <p:cNvSpPr/>
-          <p:nvPr/>
-        </p:nvSpPr>
+      <p:pic>
+        <p:nvPicPr>
+          <p:cNvPr id="9" name="Image 0" descr="assets/login_screenshot.png">    </p:cNvPr>
+          <p:cNvPicPr>
+            <a:picLocks noChangeAspect="1"/>
+          </p:cNvPicPr>
+          <p:nvPr/>
+        </p:nvPicPr>
+        <p:blipFill>
+          <a:blip r:embed="rId1"/>
+          <a:srcRect l="0" r="0" t="0" b="0"/>
+          <a:stretch/>
+        </p:blipFill>
         <p:spPr>
           <a:xfrm>
             <a:off x="7223760" y="3108960"/>
             <a:ext cx="4206240" cy="3108960"/>
           </a:xfrm>
-          <a:prstGeom prst="roundRect">
-            <a:avLst>
-              <a:gd name="adj" fmla="val 2353"/>
-            </a:avLst>
-          </a:prstGeom>
-          <a:solidFill>
-            <a:srgbClr val="EAEEF3"/>
-          </a:solidFill>
-          <a:ln w="19050">
-            <a:solidFill>
-              <a:srgbClr val="B8C7D9"/>
-            </a:solidFill>
-            <a:prstDash val="dash"/>
-          </a:ln>
-        </p:spPr>
-      </p:sp>
-      <p:sp>
-        <p:nvSpPr>
-          <p:cNvPr id="10" name="Shape 8"/>
-          <p:cNvSpPr/>
-          <p:nvPr/>
-        </p:nvSpPr>
-        <p:spPr>
-          <a:xfrm>
-            <a:off x="7498080" y="4069080"/>
-            <a:ext cx="3657600" cy="914400"/>
-          </a:xfrm>
-          <a:prstGeom prst="roundRect">
-            <a:avLst>
-              <a:gd name="adj" fmla="val 6000"/>
-            </a:avLst>
-          </a:prstGeom>
-          <a:solidFill>
-            <a:srgbClr val="FFFFFF"/>
-          </a:solidFill>
-          <a:ln w="12700">
-            <a:solidFill>
-              <a:srgbClr val="D1D9E2"/>
-            </a:solidFill>
-            <a:prstDash val="solid"/>
-          </a:ln>
-        </p:spPr>
-      </p:sp>
-      <p:sp>
-        <p:nvSpPr>
-          <p:cNvPr id="11" name="Text 9"/>
-          <p:cNvSpPr/>
-          <p:nvPr/>
-        </p:nvSpPr>
-        <p:spPr>
-          <a:xfrm>
-            <a:off x="7498080" y="4114800"/>
-            <a:ext cx="3657600" cy="411480"/>
-          </a:xfrm>
-          <a:prstGeom prst="rect">
-            <a:avLst/>
-          </a:prstGeom>
-          <a:noFill/>
-          <a:ln/>
-        </p:spPr>
-        <p:txBody>
-          <a:bodyPr wrap="square" rtlCol="0" anchor="ctr"/>
-          <a:lstStyle/>
-          <a:p>
-            <a:pPr algn="ctr" indent="0" marL="0">
-              <a:buNone/>
-            </a:pPr>
-            <a:r>
-              <a:rPr lang="en-US" sz="1100" b="1" dirty="0">
-                <a:solidFill>
-                  <a:srgbClr val="1D4E89"/>
-                </a:solidFill>
-                <a:latin typeface="Segoe UI" pitchFamily="34" charset="0"/>
-                <a:ea typeface="Segoe UI" pitchFamily="34" charset="-122"/>
-                <a:cs typeface="Segoe UI" pitchFamily="34" charset="-120"/>
-              </a:rPr>
-              <a:t>PROJECT LOGO / UI PREVIEW</a:t>
-            </a:r>
-            <a:endParaRPr lang="en-US" sz="1100" dirty="0"/>
-          </a:p>
-        </p:txBody>
-      </p:sp>
-      <p:sp>
-        <p:nvSpPr>
-          <p:cNvPr id="12" name="Text 10"/>
-          <p:cNvSpPr/>
-          <p:nvPr/>
-        </p:nvSpPr>
-        <p:spPr>
-          <a:xfrm>
-            <a:off x="7498080" y="4480560"/>
-            <a:ext cx="3657600" cy="411480"/>
-          </a:xfrm>
-          <a:prstGeom prst="rect">
-            <a:avLst/>
-          </a:prstGeom>
-          <a:noFill/>
-          <a:ln/>
-        </p:spPr>
-        <p:txBody>
-          <a:bodyPr wrap="square" rtlCol="0" anchor="ctr"/>
-          <a:lstStyle/>
-          <a:p>
-            <a:pPr algn="ctr" indent="0" marL="0">
-              <a:buNone/>
-            </a:pPr>
-            <a:r>
-              <a:rPr lang="en-US" sz="900" dirty="0">
-                <a:solidFill>
-                  <a:srgbClr val="5B6B7E"/>
-                </a:solidFill>
-                <a:latin typeface="Segoe UI" pitchFamily="34" charset="0"/>
-                <a:ea typeface="Segoe UI" pitchFamily="34" charset="-122"/>
-                <a:cs typeface="Segoe UI" pitchFamily="34" charset="-120"/>
-              </a:rPr>
-              <a:t>Insert College Logo or Dashboard Mockup</a:t>
-            </a:r>
-            <a:endParaRPr lang="en-US" sz="900" dirty="0"/>
-          </a:p>
-        </p:txBody>
-      </p:sp>
+          <a:prstGeom prst="rect">
+            <a:avLst/>
+          </a:prstGeom>
+        </p:spPr>
+      </p:pic>
     </p:spTree>
   </p:cSld>
   <p:clrMapOvr>
@@ -8920,138 +8811,29 @@
           </a:p>
         </p:txBody>
       </p:sp>
-      <p:sp>
-        <p:nvSpPr>
-          <p:cNvPr id="10" name="Shape 8"/>
-          <p:cNvSpPr/>
-          <p:nvPr/>
-        </p:nvSpPr>
+      <p:pic>
+        <p:nvPicPr>
+          <p:cNvPr id="10" name="Image 0" descr="assets/login_screenshot.png">    </p:cNvPr>
+          <p:cNvPicPr>
+            <a:picLocks noChangeAspect="1"/>
+          </p:cNvPicPr>
+          <p:nvPr/>
+        </p:nvPicPr>
+        <p:blipFill>
+          <a:blip r:embed="rId1"/>
+          <a:srcRect l="0" r="0" t="0" b="0"/>
+          <a:stretch/>
+        </p:blipFill>
         <p:spPr>
           <a:xfrm>
             <a:off x="6400800" y="1143000"/>
             <a:ext cx="5029200" cy="5029200"/>
           </a:xfrm>
-          <a:prstGeom prst="roundRect">
-            <a:avLst>
-              <a:gd name="adj" fmla="val 1455"/>
-            </a:avLst>
-          </a:prstGeom>
-          <a:solidFill>
-            <a:srgbClr val="EAEEF3"/>
-          </a:solidFill>
-          <a:ln w="19050">
-            <a:solidFill>
-              <a:srgbClr val="B8C7D9"/>
-            </a:solidFill>
-            <a:prstDash val="dash"/>
-          </a:ln>
-        </p:spPr>
-      </p:sp>
-      <p:sp>
-        <p:nvSpPr>
-          <p:cNvPr id="11" name="Shape 9"/>
-          <p:cNvSpPr/>
-          <p:nvPr/>
-        </p:nvSpPr>
-        <p:spPr>
-          <a:xfrm>
-            <a:off x="6995160" y="3063240"/>
-            <a:ext cx="3840480" cy="914400"/>
-          </a:xfrm>
-          <a:prstGeom prst="roundRect">
-            <a:avLst>
-              <a:gd name="adj" fmla="val 6000"/>
-            </a:avLst>
-          </a:prstGeom>
-          <a:solidFill>
-            <a:srgbClr val="FFFFFF"/>
-          </a:solidFill>
-          <a:ln w="12700">
-            <a:solidFill>
-              <a:srgbClr val="D1D9E2"/>
-            </a:solidFill>
-            <a:prstDash val="solid"/>
-          </a:ln>
-        </p:spPr>
-      </p:sp>
-      <p:sp>
-        <p:nvSpPr>
-          <p:cNvPr id="12" name="Text 10"/>
-          <p:cNvSpPr/>
-          <p:nvPr/>
-        </p:nvSpPr>
-        <p:spPr>
-          <a:xfrm>
-            <a:off x="6995160" y="3108960"/>
-            <a:ext cx="3840480" cy="411480"/>
-          </a:xfrm>
-          <a:prstGeom prst="rect">
-            <a:avLst/>
-          </a:prstGeom>
-          <a:noFill/>
-          <a:ln/>
-        </p:spPr>
-        <p:txBody>
-          <a:bodyPr wrap="square" rtlCol="0" anchor="ctr"/>
-          <a:lstStyle/>
-          <a:p>
-            <a:pPr algn="ctr" indent="0" marL="0">
-              <a:buNone/>
-            </a:pPr>
-            <a:r>
-              <a:rPr lang="en-US" sz="1100" b="1" dirty="0">
-                <a:solidFill>
-                  <a:srgbClr val="1D4E89"/>
-                </a:solidFill>
-                <a:latin typeface="Segoe UI" pitchFamily="34" charset="0"/>
-                <a:ea typeface="Segoe UI" pitchFamily="34" charset="-122"/>
-                <a:cs typeface="Segoe UI" pitchFamily="34" charset="-120"/>
-              </a:rPr>
-              <a:t>LOGIN &amp; DASHBOARD UI SCREENSHOT</a:t>
-            </a:r>
-            <a:endParaRPr lang="en-US" sz="1100" dirty="0"/>
-          </a:p>
-        </p:txBody>
-      </p:sp>
-      <p:sp>
-        <p:nvSpPr>
-          <p:cNvPr id="13" name="Text 11"/>
-          <p:cNvSpPr/>
-          <p:nvPr/>
-        </p:nvSpPr>
-        <p:spPr>
-          <a:xfrm>
-            <a:off x="6995160" y="3474720"/>
-            <a:ext cx="3840480" cy="411480"/>
-          </a:xfrm>
-          <a:prstGeom prst="rect">
-            <a:avLst/>
-          </a:prstGeom>
-          <a:noFill/>
-          <a:ln/>
-        </p:spPr>
-        <p:txBody>
-          <a:bodyPr wrap="square" rtlCol="0" anchor="ctr"/>
-          <a:lstStyle/>
-          <a:p>
-            <a:pPr algn="ctr" indent="0" marL="0">
-              <a:buNone/>
-            </a:pPr>
-            <a:r>
-              <a:rPr lang="en-US" sz="900" dirty="0">
-                <a:solidFill>
-                  <a:srgbClr val="5B6B7E"/>
-                </a:solidFill>
-                <a:latin typeface="Segoe UI" pitchFamily="34" charset="0"/>
-                <a:ea typeface="Segoe UI" pitchFamily="34" charset="-122"/>
-                <a:cs typeface="Segoe UI" pitchFamily="34" charset="-120"/>
-              </a:rPr>
-              <a:t>Paste Screenshot of login.html and dashboard.html</a:t>
-            </a:r>
-            <a:endParaRPr lang="en-US" sz="900" dirty="0"/>
-          </a:p>
-        </p:txBody>
-      </p:sp>
+          <a:prstGeom prst="rect">
+            <a:avLst/>
+          </a:prstGeom>
+        </p:spPr>
+      </p:pic>
     </p:spTree>
   </p:cSld>
   <p:clrMapOvr>
